--- a/SST_Complete_Course_SagarSir/01_Civics_नागरिक_शास्त्र/Class_04_Civics_Secularism_Law_MahaAbhyas.pptx
+++ b/SST_Complete_Course_SagarSir/01_Civics_नागरिक_शास्त्र/Class_04_Civics_Secularism_Law_MahaAbhyas.pptx
@@ -3367,7 +3367,7 @@
               </a:defRPr>
             </a:pPr>
             <a:r>
-              <a:t>मार्गदर्शक: श्रवण कुमार 'सागर' (Sagar Sir)  |  Helpline: +91 91101 13671  |  sagarcoaching.tech</a:t>
+              <a:t>मार्गदर्शक: श्रवण कुमार 'सागर' (Sagar Sir)  |  sagarcoaching.tech</a:t>
             </a:r>
           </a:p>
         </p:txBody>
@@ -3558,7 +3558,7 @@
               </a:defRPr>
             </a:pPr>
             <a:r>
-              <a:t>WhatsApp / Helpline: +91 91101 13671  |  Official Website: sagarcoaching.tech  |  Slide 10 of 37</a:t>
+              <a:t>Official Website: sagarcoaching.tech  |  Slide 10 of 37</a:t>
             </a:r>
           </a:p>
         </p:txBody>
@@ -4092,7 +4092,7 @@
               </a:defRPr>
             </a:pPr>
             <a:r>
-              <a:t>WhatsApp / Helpline: +91 91101 13671  |  Official Website: sagarcoaching.tech  |  Slide 11 of 37</a:t>
+              <a:t>Official Website: sagarcoaching.tech  |  Slide 11 of 37</a:t>
             </a:r>
           </a:p>
         </p:txBody>
@@ -4558,7 +4558,7 @@
               </a:defRPr>
             </a:pPr>
             <a:r>
-              <a:t>WhatsApp / Helpline: +91 91101 13671  |  Official Website: sagarcoaching.tech  |  Slide 12 of 37</a:t>
+              <a:t>Official Website: sagarcoaching.tech  |  Slide 12 of 37</a:t>
             </a:r>
           </a:p>
         </p:txBody>
@@ -5092,7 +5092,7 @@
               </a:defRPr>
             </a:pPr>
             <a:r>
-              <a:t>WhatsApp / Helpline: +91 91101 13671  |  Official Website: sagarcoaching.tech  |  Slide 13 of 37</a:t>
+              <a:t>Official Website: sagarcoaching.tech  |  Slide 13 of 37</a:t>
             </a:r>
           </a:p>
         </p:txBody>
@@ -5558,7 +5558,7 @@
               </a:defRPr>
             </a:pPr>
             <a:r>
-              <a:t>WhatsApp / Helpline: +91 91101 13671  |  Official Website: sagarcoaching.tech  |  Slide 14 of 37</a:t>
+              <a:t>Official Website: sagarcoaching.tech  |  Slide 14 of 37</a:t>
             </a:r>
           </a:p>
         </p:txBody>
@@ -6092,7 +6092,7 @@
               </a:defRPr>
             </a:pPr>
             <a:r>
-              <a:t>WhatsApp / Helpline: +91 91101 13671  |  Official Website: sagarcoaching.tech  |  Slide 15 of 37</a:t>
+              <a:t>Official Website: sagarcoaching.tech  |  Slide 15 of 37</a:t>
             </a:r>
           </a:p>
         </p:txBody>
@@ -6558,7 +6558,7 @@
               </a:defRPr>
             </a:pPr>
             <a:r>
-              <a:t>WhatsApp / Helpline: +91 91101 13671  |  Official Website: sagarcoaching.tech  |  Slide 16 of 37</a:t>
+              <a:t>Official Website: sagarcoaching.tech  |  Slide 16 of 37</a:t>
             </a:r>
           </a:p>
         </p:txBody>
@@ -7092,7 +7092,7 @@
               </a:defRPr>
             </a:pPr>
             <a:r>
-              <a:t>WhatsApp / Helpline: +91 91101 13671  |  Official Website: sagarcoaching.tech  |  Slide 17 of 37</a:t>
+              <a:t>Official Website: sagarcoaching.tech  |  Slide 17 of 37</a:t>
             </a:r>
           </a:p>
         </p:txBody>
@@ -7558,7 +7558,7 @@
               </a:defRPr>
             </a:pPr>
             <a:r>
-              <a:t>WhatsApp / Helpline: +91 91101 13671  |  Official Website: sagarcoaching.tech  |  Slide 18 of 37</a:t>
+              <a:t>Official Website: sagarcoaching.tech  |  Slide 18 of 37</a:t>
             </a:r>
           </a:p>
         </p:txBody>
@@ -8092,7 +8092,7 @@
               </a:defRPr>
             </a:pPr>
             <a:r>
-              <a:t>WhatsApp / Helpline: +91 91101 13671  |  Official Website: sagarcoaching.tech  |  Slide 19 of 37</a:t>
+              <a:t>Official Website: sagarcoaching.tech  |  Slide 19 of 37</a:t>
             </a:r>
           </a:p>
         </p:txBody>
@@ -8558,7 +8558,7 @@
               </a:defRPr>
             </a:pPr>
             <a:r>
-              <a:t>WhatsApp / Helpline: +91 91101 13671  |  Official Website: sagarcoaching.tech  |  Slide 2 of 37</a:t>
+              <a:t>Official Website: sagarcoaching.tech  |  Slide 2 of 37</a:t>
             </a:r>
           </a:p>
         </p:txBody>
@@ -8918,7 +8918,7 @@
               </a:defRPr>
             </a:pPr>
             <a:r>
-              <a:t>WhatsApp / Helpline: +91 91101 13671  |  Official Website: sagarcoaching.tech  |  Slide 20 of 37</a:t>
+              <a:t>Official Website: sagarcoaching.tech  |  Slide 20 of 37</a:t>
             </a:r>
           </a:p>
         </p:txBody>
@@ -9452,7 +9452,7 @@
               </a:defRPr>
             </a:pPr>
             <a:r>
-              <a:t>WhatsApp / Helpline: +91 91101 13671  |  Official Website: sagarcoaching.tech  |  Slide 21 of 37</a:t>
+              <a:t>Official Website: sagarcoaching.tech  |  Slide 21 of 37</a:t>
             </a:r>
           </a:p>
         </p:txBody>
@@ -9918,7 +9918,7 @@
               </a:defRPr>
             </a:pPr>
             <a:r>
-              <a:t>WhatsApp / Helpline: +91 91101 13671  |  Official Website: sagarcoaching.tech  |  Slide 22 of 37</a:t>
+              <a:t>Official Website: sagarcoaching.tech  |  Slide 22 of 37</a:t>
             </a:r>
           </a:p>
         </p:txBody>
@@ -10452,7 +10452,7 @@
               </a:defRPr>
             </a:pPr>
             <a:r>
-              <a:t>WhatsApp / Helpline: +91 91101 13671  |  Official Website: sagarcoaching.tech  |  Slide 23 of 37</a:t>
+              <a:t>Official Website: sagarcoaching.tech  |  Slide 23 of 37</a:t>
             </a:r>
           </a:p>
         </p:txBody>
@@ -10918,7 +10918,7 @@
               </a:defRPr>
             </a:pPr>
             <a:r>
-              <a:t>WhatsApp / Helpline: +91 91101 13671  |  Official Website: sagarcoaching.tech  |  Slide 24 of 37</a:t>
+              <a:t>Official Website: sagarcoaching.tech  |  Slide 24 of 37</a:t>
             </a:r>
           </a:p>
         </p:txBody>
@@ -11452,7 +11452,7 @@
               </a:defRPr>
             </a:pPr>
             <a:r>
-              <a:t>WhatsApp / Helpline: +91 91101 13671  |  Official Website: sagarcoaching.tech  |  Slide 25 of 37</a:t>
+              <a:t>Official Website: sagarcoaching.tech  |  Slide 25 of 37</a:t>
             </a:r>
           </a:p>
         </p:txBody>
@@ -11918,7 +11918,7 @@
               </a:defRPr>
             </a:pPr>
             <a:r>
-              <a:t>WhatsApp / Helpline: +91 91101 13671  |  Official Website: sagarcoaching.tech  |  Slide 26 of 37</a:t>
+              <a:t>Official Website: sagarcoaching.tech  |  Slide 26 of 37</a:t>
             </a:r>
           </a:p>
         </p:txBody>
@@ -12452,7 +12452,7 @@
               </a:defRPr>
             </a:pPr>
             <a:r>
-              <a:t>WhatsApp / Helpline: +91 91101 13671  |  Official Website: sagarcoaching.tech  |  Slide 27 of 37</a:t>
+              <a:t>Official Website: sagarcoaching.tech  |  Slide 27 of 37</a:t>
             </a:r>
           </a:p>
         </p:txBody>
@@ -12918,7 +12918,7 @@
               </a:defRPr>
             </a:pPr>
             <a:r>
-              <a:t>WhatsApp / Helpline: +91 91101 13671  |  Official Website: sagarcoaching.tech  |  Slide 28 of 37</a:t>
+              <a:t>Official Website: sagarcoaching.tech  |  Slide 28 of 37</a:t>
             </a:r>
           </a:p>
         </p:txBody>
@@ -13452,7 +13452,7 @@
               </a:defRPr>
             </a:pPr>
             <a:r>
-              <a:t>WhatsApp / Helpline: +91 91101 13671  |  Official Website: sagarcoaching.tech  |  Slide 29 of 37</a:t>
+              <a:t>Official Website: sagarcoaching.tech  |  Slide 29 of 37</a:t>
             </a:r>
           </a:p>
         </p:txBody>
@@ -13918,7 +13918,7 @@
               </a:defRPr>
             </a:pPr>
             <a:r>
-              <a:t>WhatsApp / Helpline: +91 91101 13671  |  Official Website: sagarcoaching.tech  |  Slide 3 of 37</a:t>
+              <a:t>Official Website: sagarcoaching.tech  |  Slide 3 of 37</a:t>
             </a:r>
           </a:p>
         </p:txBody>
@@ -14335,7 +14335,7 @@
               </a:defRPr>
             </a:pPr>
             <a:r>
-              <a:t>WhatsApp / Helpline: +91 91101 13671  |  Official Website: sagarcoaching.tech  |  Slide 30 of 37</a:t>
+              <a:t>Official Website: sagarcoaching.tech  |  Slide 30 of 37</a:t>
             </a:r>
           </a:p>
         </p:txBody>
@@ -14869,7 +14869,7 @@
               </a:defRPr>
             </a:pPr>
             <a:r>
-              <a:t>WhatsApp / Helpline: +91 91101 13671  |  Official Website: sagarcoaching.tech  |  Slide 31 of 37</a:t>
+              <a:t>Official Website: sagarcoaching.tech  |  Slide 31 of 37</a:t>
             </a:r>
           </a:p>
         </p:txBody>
@@ -15335,7 +15335,7 @@
               </a:defRPr>
             </a:pPr>
             <a:r>
-              <a:t>WhatsApp / Helpline: +91 91101 13671  |  Official Website: sagarcoaching.tech  |  Slide 32 of 37</a:t>
+              <a:t>Official Website: sagarcoaching.tech  |  Slide 32 of 37</a:t>
             </a:r>
           </a:p>
         </p:txBody>
@@ -15869,7 +15869,7 @@
               </a:defRPr>
             </a:pPr>
             <a:r>
-              <a:t>WhatsApp / Helpline: +91 91101 13671  |  Official Website: sagarcoaching.tech  |  Slide 33 of 37</a:t>
+              <a:t>Official Website: sagarcoaching.tech  |  Slide 33 of 37</a:t>
             </a:r>
           </a:p>
         </p:txBody>
@@ -16335,7 +16335,7 @@
               </a:defRPr>
             </a:pPr>
             <a:r>
-              <a:t>WhatsApp / Helpline: +91 91101 13671  |  Official Website: sagarcoaching.tech  |  Slide 34 of 37</a:t>
+              <a:t>Official Website: sagarcoaching.tech  |  Slide 34 of 37</a:t>
             </a:r>
           </a:p>
         </p:txBody>
@@ -16869,7 +16869,7 @@
               </a:defRPr>
             </a:pPr>
             <a:r>
-              <a:t>WhatsApp / Helpline: +91 91101 13671  |  Official Website: sagarcoaching.tech  |  Slide 35 of 37</a:t>
+              <a:t>Official Website: sagarcoaching.tech  |  Slide 35 of 37</a:t>
             </a:r>
           </a:p>
         </p:txBody>
@@ -17195,7 +17195,7 @@
               </a:defRPr>
             </a:pPr>
             <a:r>
-              <a:t>WhatsApp / Helpline: +91 91101 13671  |  Official Website: sagarcoaching.tech  |  Slide 36 of 37</a:t>
+              <a:t>Official Website: sagarcoaching.tech  |  Slide 36 of 37</a:t>
             </a:r>
           </a:p>
         </p:txBody>
@@ -17492,7 +17492,7 @@
               </a:defRPr>
             </a:pPr>
             <a:r>
-              <a:t>इस क्लास की PDF डाउनलोड करें: sagarcoaching.tech | Helpline: +91 91101 13671</a:t>
+              <a:t>इस क्लास की PDF डाउनलोड करें: sagarcoaching.tech</a:t>
             </a:r>
           </a:p>
         </p:txBody>
@@ -17596,7 +17596,7 @@
               </a:defRPr>
             </a:pPr>
             <a:r>
-              <a:t>मार्गदर्शक: श्रवण कुमार 'सागर' (Sagar Sir)  |  Helpline: +91 91101 13671  |  sagarcoaching.tech</a:t>
+              <a:t>मार्गदर्शक: श्रवण कुमार 'सागर' (Sagar Sir)  |  sagarcoaching.tech</a:t>
             </a:r>
           </a:p>
         </p:txBody>
@@ -17787,7 +17787,7 @@
               </a:defRPr>
             </a:pPr>
             <a:r>
-              <a:t>WhatsApp / Helpline: +91 91101 13671  |  Official Website: sagarcoaching.tech  |  Slide 4 of 37</a:t>
+              <a:t>Official Website: sagarcoaching.tech  |  Slide 4 of 37</a:t>
             </a:r>
           </a:p>
         </p:txBody>
@@ -18147,7 +18147,7 @@
               </a:defRPr>
             </a:pPr>
             <a:r>
-              <a:t>WhatsApp / Helpline: +91 91101 13671  |  Official Website: sagarcoaching.tech  |  Slide 5 of 37</a:t>
+              <a:t>Official Website: sagarcoaching.tech  |  Slide 5 of 37</a:t>
             </a:r>
           </a:p>
         </p:txBody>
@@ -18613,7 +18613,7 @@
               </a:defRPr>
             </a:pPr>
             <a:r>
-              <a:t>WhatsApp / Helpline: +91 91101 13671  |  Official Website: sagarcoaching.tech  |  Slide 6 of 37</a:t>
+              <a:t>Official Website: sagarcoaching.tech  |  Slide 6 of 37</a:t>
             </a:r>
           </a:p>
         </p:txBody>
@@ -19147,7 +19147,7 @@
               </a:defRPr>
             </a:pPr>
             <a:r>
-              <a:t>WhatsApp / Helpline: +91 91101 13671  |  Official Website: sagarcoaching.tech  |  Slide 7 of 37</a:t>
+              <a:t>Official Website: sagarcoaching.tech  |  Slide 7 of 37</a:t>
             </a:r>
           </a:p>
         </p:txBody>
@@ -19613,7 +19613,7 @@
               </a:defRPr>
             </a:pPr>
             <a:r>
-              <a:t>WhatsApp / Helpline: +91 91101 13671  |  Official Website: sagarcoaching.tech  |  Slide 8 of 37</a:t>
+              <a:t>Official Website: sagarcoaching.tech  |  Slide 8 of 37</a:t>
             </a:r>
           </a:p>
         </p:txBody>
@@ -20147,7 +20147,7 @@
               </a:defRPr>
             </a:pPr>
             <a:r>
-              <a:t>WhatsApp / Helpline: +91 91101 13671  |  Official Website: sagarcoaching.tech  |  Slide 9 of 37</a:t>
+              <a:t>Official Website: sagarcoaching.tech  |  Slide 9 of 37</a:t>
             </a:r>
           </a:p>
         </p:txBody>
